--- a/安靜(崇拜版).pptx
+++ b/安靜(崇拜版).pptx
@@ -165,10 +165,9 @@
           <a:lstStyle/>
           <a:p>
             <a:r>
-              <a:rPr lang="zh-TW" altLang="en-US" smtClean="0"/>
+              <a:rPr lang="zh-TW" altLang="en-US"/>
               <a:t>按一下以編輯母片標題樣式</a:t>
             </a:r>
-            <a:endParaRPr lang="zh-TW" altLang="en-US"/>
           </a:p>
         </p:txBody>
       </p:sp>
@@ -284,10 +283,9 @@
           </a:lstStyle>
           <a:p>
             <a:r>
-              <a:rPr lang="zh-TW" altLang="en-US" smtClean="0"/>
+              <a:rPr lang="zh-TW" altLang="en-US"/>
               <a:t>按一下以編輯母片副標題樣式</a:t>
             </a:r>
-            <a:endParaRPr lang="zh-TW" altLang="en-US"/>
           </a:p>
         </p:txBody>
       </p:sp>
@@ -308,7 +306,7 @@
           <a:p>
             <a:fld id="{B4A29A6A-427F-4B19-8281-5DE5E0B60C4E}" type="datetimeFigureOut">
               <a:rPr lang="zh-TW" altLang="en-US" smtClean="0"/>
-              <a:t>2023/8/12</a:t>
+              <a:t>2024/6/22</a:t>
             </a:fld>
             <a:endParaRPr lang="zh-TW" altLang="en-US"/>
           </a:p>
@@ -397,10 +395,9 @@
           <a:lstStyle/>
           <a:p>
             <a:r>
-              <a:rPr lang="zh-TW" altLang="en-US" smtClean="0"/>
+              <a:rPr lang="zh-TW" altLang="en-US"/>
               <a:t>按一下以編輯母片標題樣式</a:t>
             </a:r>
-            <a:endParaRPr lang="zh-TW" altLang="en-US"/>
           </a:p>
         </p:txBody>
       </p:sp>
@@ -421,38 +418,37 @@
           <a:p>
             <a:pPr lvl="0"/>
             <a:r>
-              <a:rPr lang="zh-TW" altLang="en-US" smtClean="0"/>
+              <a:rPr lang="zh-TW" altLang="en-US"/>
               <a:t>按一下以編輯母片文字樣式</a:t>
             </a:r>
           </a:p>
           <a:p>
             <a:pPr lvl="1"/>
             <a:r>
-              <a:rPr lang="zh-TW" altLang="en-US" smtClean="0"/>
+              <a:rPr lang="zh-TW" altLang="en-US"/>
               <a:t>第二層</a:t>
             </a:r>
           </a:p>
           <a:p>
             <a:pPr lvl="2"/>
             <a:r>
-              <a:rPr lang="zh-TW" altLang="en-US" smtClean="0"/>
+              <a:rPr lang="zh-TW" altLang="en-US"/>
               <a:t>第三層</a:t>
             </a:r>
           </a:p>
           <a:p>
             <a:pPr lvl="3"/>
             <a:r>
-              <a:rPr lang="zh-TW" altLang="en-US" smtClean="0"/>
+              <a:rPr lang="zh-TW" altLang="en-US"/>
               <a:t>第四層</a:t>
             </a:r>
           </a:p>
           <a:p>
             <a:pPr lvl="4"/>
             <a:r>
-              <a:rPr lang="zh-TW" altLang="en-US" smtClean="0"/>
+              <a:rPr lang="zh-TW" altLang="en-US"/>
               <a:t>第五層</a:t>
             </a:r>
-            <a:endParaRPr lang="zh-TW" altLang="en-US"/>
           </a:p>
         </p:txBody>
       </p:sp>
@@ -473,7 +469,7 @@
           <a:p>
             <a:fld id="{B4A29A6A-427F-4B19-8281-5DE5E0B60C4E}" type="datetimeFigureOut">
               <a:rPr lang="zh-TW" altLang="en-US" smtClean="0"/>
-              <a:t>2023/8/12</a:t>
+              <a:t>2024/6/22</a:t>
             </a:fld>
             <a:endParaRPr lang="zh-TW" altLang="en-US"/>
           </a:p>
@@ -567,10 +563,9 @@
           <a:lstStyle/>
           <a:p>
             <a:r>
-              <a:rPr lang="zh-TW" altLang="en-US" smtClean="0"/>
+              <a:rPr lang="zh-TW" altLang="en-US"/>
               <a:t>按一下以編輯母片標題樣式</a:t>
             </a:r>
-            <a:endParaRPr lang="zh-TW" altLang="en-US"/>
           </a:p>
         </p:txBody>
       </p:sp>
@@ -596,38 +591,37 @@
           <a:p>
             <a:pPr lvl="0"/>
             <a:r>
-              <a:rPr lang="zh-TW" altLang="en-US" smtClean="0"/>
+              <a:rPr lang="zh-TW" altLang="en-US"/>
               <a:t>按一下以編輯母片文字樣式</a:t>
             </a:r>
           </a:p>
           <a:p>
             <a:pPr lvl="1"/>
             <a:r>
-              <a:rPr lang="zh-TW" altLang="en-US" smtClean="0"/>
+              <a:rPr lang="zh-TW" altLang="en-US"/>
               <a:t>第二層</a:t>
             </a:r>
           </a:p>
           <a:p>
             <a:pPr lvl="2"/>
             <a:r>
-              <a:rPr lang="zh-TW" altLang="en-US" smtClean="0"/>
+              <a:rPr lang="zh-TW" altLang="en-US"/>
               <a:t>第三層</a:t>
             </a:r>
           </a:p>
           <a:p>
             <a:pPr lvl="3"/>
             <a:r>
-              <a:rPr lang="zh-TW" altLang="en-US" smtClean="0"/>
+              <a:rPr lang="zh-TW" altLang="en-US"/>
               <a:t>第四層</a:t>
             </a:r>
           </a:p>
           <a:p>
             <a:pPr lvl="4"/>
             <a:r>
-              <a:rPr lang="zh-TW" altLang="en-US" smtClean="0"/>
+              <a:rPr lang="zh-TW" altLang="en-US"/>
               <a:t>第五層</a:t>
             </a:r>
-            <a:endParaRPr lang="zh-TW" altLang="en-US"/>
           </a:p>
         </p:txBody>
       </p:sp>
@@ -648,7 +642,7 @@
           <a:p>
             <a:fld id="{B4A29A6A-427F-4B19-8281-5DE5E0B60C4E}" type="datetimeFigureOut">
               <a:rPr lang="zh-TW" altLang="en-US" smtClean="0"/>
-              <a:t>2023/8/12</a:t>
+              <a:t>2024/6/22</a:t>
             </a:fld>
             <a:endParaRPr lang="zh-TW" altLang="en-US"/>
           </a:p>
@@ -737,10 +731,9 @@
           <a:lstStyle/>
           <a:p>
             <a:r>
-              <a:rPr lang="zh-TW" altLang="en-US" smtClean="0"/>
+              <a:rPr lang="zh-TW" altLang="en-US"/>
               <a:t>按一下以編輯母片標題樣式</a:t>
             </a:r>
-            <a:endParaRPr lang="zh-TW" altLang="en-US"/>
           </a:p>
         </p:txBody>
       </p:sp>
@@ -761,38 +754,37 @@
           <a:p>
             <a:pPr lvl="0"/>
             <a:r>
-              <a:rPr lang="zh-TW" altLang="en-US" smtClean="0"/>
+              <a:rPr lang="zh-TW" altLang="en-US"/>
               <a:t>按一下以編輯母片文字樣式</a:t>
             </a:r>
           </a:p>
           <a:p>
             <a:pPr lvl="1"/>
             <a:r>
-              <a:rPr lang="zh-TW" altLang="en-US" smtClean="0"/>
+              <a:rPr lang="zh-TW" altLang="en-US"/>
               <a:t>第二層</a:t>
             </a:r>
           </a:p>
           <a:p>
             <a:pPr lvl="2"/>
             <a:r>
-              <a:rPr lang="zh-TW" altLang="en-US" smtClean="0"/>
+              <a:rPr lang="zh-TW" altLang="en-US"/>
               <a:t>第三層</a:t>
             </a:r>
           </a:p>
           <a:p>
             <a:pPr lvl="3"/>
             <a:r>
-              <a:rPr lang="zh-TW" altLang="en-US" smtClean="0"/>
+              <a:rPr lang="zh-TW" altLang="en-US"/>
               <a:t>第四層</a:t>
             </a:r>
           </a:p>
           <a:p>
             <a:pPr lvl="4"/>
             <a:r>
-              <a:rPr lang="zh-TW" altLang="en-US" smtClean="0"/>
+              <a:rPr lang="zh-TW" altLang="en-US"/>
               <a:t>第五層</a:t>
             </a:r>
-            <a:endParaRPr lang="zh-TW" altLang="en-US"/>
           </a:p>
         </p:txBody>
       </p:sp>
@@ -813,7 +805,7 @@
           <a:p>
             <a:fld id="{B4A29A6A-427F-4B19-8281-5DE5E0B60C4E}" type="datetimeFigureOut">
               <a:rPr lang="zh-TW" altLang="en-US" smtClean="0"/>
-              <a:t>2023/8/12</a:t>
+              <a:t>2024/6/22</a:t>
             </a:fld>
             <a:endParaRPr lang="zh-TW" altLang="en-US"/>
           </a:p>
@@ -911,10 +903,9 @@
           </a:lstStyle>
           <a:p>
             <a:r>
-              <a:rPr lang="zh-TW" altLang="en-US" smtClean="0"/>
+              <a:rPr lang="zh-TW" altLang="en-US"/>
               <a:t>按一下以編輯母片標題樣式</a:t>
             </a:r>
-            <a:endParaRPr lang="zh-TW" altLang="en-US"/>
           </a:p>
         </p:txBody>
       </p:sp>
@@ -1031,7 +1022,7 @@
           <a:p>
             <a:pPr lvl="0"/>
             <a:r>
-              <a:rPr lang="zh-TW" altLang="en-US" smtClean="0"/>
+              <a:rPr lang="zh-TW" altLang="en-US"/>
               <a:t>按一下以編輯母片文字樣式</a:t>
             </a:r>
           </a:p>
@@ -1054,7 +1045,7 @@
           <a:p>
             <a:fld id="{B4A29A6A-427F-4B19-8281-5DE5E0B60C4E}" type="datetimeFigureOut">
               <a:rPr lang="zh-TW" altLang="en-US" smtClean="0"/>
-              <a:t>2023/8/12</a:t>
+              <a:t>2024/6/22</a:t>
             </a:fld>
             <a:endParaRPr lang="zh-TW" altLang="en-US"/>
           </a:p>
@@ -1143,10 +1134,9 @@
           <a:lstStyle/>
           <a:p>
             <a:r>
-              <a:rPr lang="zh-TW" altLang="en-US" smtClean="0"/>
+              <a:rPr lang="zh-TW" altLang="en-US"/>
               <a:t>按一下以編輯母片標題樣式</a:t>
             </a:r>
-            <a:endParaRPr lang="zh-TW" altLang="en-US"/>
           </a:p>
         </p:txBody>
       </p:sp>
@@ -1200,38 +1190,37 @@
           <a:p>
             <a:pPr lvl="0"/>
             <a:r>
-              <a:rPr lang="zh-TW" altLang="en-US" smtClean="0"/>
+              <a:rPr lang="zh-TW" altLang="en-US"/>
               <a:t>按一下以編輯母片文字樣式</a:t>
             </a:r>
           </a:p>
           <a:p>
             <a:pPr lvl="1"/>
             <a:r>
-              <a:rPr lang="zh-TW" altLang="en-US" smtClean="0"/>
+              <a:rPr lang="zh-TW" altLang="en-US"/>
               <a:t>第二層</a:t>
             </a:r>
           </a:p>
           <a:p>
             <a:pPr lvl="2"/>
             <a:r>
-              <a:rPr lang="zh-TW" altLang="en-US" smtClean="0"/>
+              <a:rPr lang="zh-TW" altLang="en-US"/>
               <a:t>第三層</a:t>
             </a:r>
           </a:p>
           <a:p>
             <a:pPr lvl="3"/>
             <a:r>
-              <a:rPr lang="zh-TW" altLang="en-US" smtClean="0"/>
+              <a:rPr lang="zh-TW" altLang="en-US"/>
               <a:t>第四層</a:t>
             </a:r>
           </a:p>
           <a:p>
             <a:pPr lvl="4"/>
             <a:r>
-              <a:rPr lang="zh-TW" altLang="en-US" smtClean="0"/>
+              <a:rPr lang="zh-TW" altLang="en-US"/>
               <a:t>第五層</a:t>
             </a:r>
-            <a:endParaRPr lang="zh-TW" altLang="en-US"/>
           </a:p>
         </p:txBody>
       </p:sp>
@@ -1285,38 +1274,37 @@
           <a:p>
             <a:pPr lvl="0"/>
             <a:r>
-              <a:rPr lang="zh-TW" altLang="en-US" smtClean="0"/>
+              <a:rPr lang="zh-TW" altLang="en-US"/>
               <a:t>按一下以編輯母片文字樣式</a:t>
             </a:r>
           </a:p>
           <a:p>
             <a:pPr lvl="1"/>
             <a:r>
-              <a:rPr lang="zh-TW" altLang="en-US" smtClean="0"/>
+              <a:rPr lang="zh-TW" altLang="en-US"/>
               <a:t>第二層</a:t>
             </a:r>
           </a:p>
           <a:p>
             <a:pPr lvl="2"/>
             <a:r>
-              <a:rPr lang="zh-TW" altLang="en-US" smtClean="0"/>
+              <a:rPr lang="zh-TW" altLang="en-US"/>
               <a:t>第三層</a:t>
             </a:r>
           </a:p>
           <a:p>
             <a:pPr lvl="3"/>
             <a:r>
-              <a:rPr lang="zh-TW" altLang="en-US" smtClean="0"/>
+              <a:rPr lang="zh-TW" altLang="en-US"/>
               <a:t>第四層</a:t>
             </a:r>
           </a:p>
           <a:p>
             <a:pPr lvl="4"/>
             <a:r>
-              <a:rPr lang="zh-TW" altLang="en-US" smtClean="0"/>
+              <a:rPr lang="zh-TW" altLang="en-US"/>
               <a:t>第五層</a:t>
             </a:r>
-            <a:endParaRPr lang="zh-TW" altLang="en-US"/>
           </a:p>
         </p:txBody>
       </p:sp>
@@ -1337,7 +1325,7 @@
           <a:p>
             <a:fld id="{B4A29A6A-427F-4B19-8281-5DE5E0B60C4E}" type="datetimeFigureOut">
               <a:rPr lang="zh-TW" altLang="en-US" smtClean="0"/>
-              <a:t>2023/8/12</a:t>
+              <a:t>2024/6/22</a:t>
             </a:fld>
             <a:endParaRPr lang="zh-TW" altLang="en-US"/>
           </a:p>
@@ -1430,10 +1418,9 @@
           </a:lstStyle>
           <a:p>
             <a:r>
-              <a:rPr lang="zh-TW" altLang="en-US" smtClean="0"/>
+              <a:rPr lang="zh-TW" altLang="en-US"/>
               <a:t>按一下以編輯母片標題樣式</a:t>
             </a:r>
-            <a:endParaRPr lang="zh-TW" altLang="en-US"/>
           </a:p>
         </p:txBody>
       </p:sp>
@@ -1496,7 +1483,7 @@
           <a:p>
             <a:pPr lvl="0"/>
             <a:r>
-              <a:rPr lang="zh-TW" altLang="en-US" smtClean="0"/>
+              <a:rPr lang="zh-TW" altLang="en-US"/>
               <a:t>按一下以編輯母片文字樣式</a:t>
             </a:r>
           </a:p>
@@ -1552,38 +1539,37 @@
           <a:p>
             <a:pPr lvl="0"/>
             <a:r>
-              <a:rPr lang="zh-TW" altLang="en-US" smtClean="0"/>
+              <a:rPr lang="zh-TW" altLang="en-US"/>
               <a:t>按一下以編輯母片文字樣式</a:t>
             </a:r>
           </a:p>
           <a:p>
             <a:pPr lvl="1"/>
             <a:r>
-              <a:rPr lang="zh-TW" altLang="en-US" smtClean="0"/>
+              <a:rPr lang="zh-TW" altLang="en-US"/>
               <a:t>第二層</a:t>
             </a:r>
           </a:p>
           <a:p>
             <a:pPr lvl="2"/>
             <a:r>
-              <a:rPr lang="zh-TW" altLang="en-US" smtClean="0"/>
+              <a:rPr lang="zh-TW" altLang="en-US"/>
               <a:t>第三層</a:t>
             </a:r>
           </a:p>
           <a:p>
             <a:pPr lvl="3"/>
             <a:r>
-              <a:rPr lang="zh-TW" altLang="en-US" smtClean="0"/>
+              <a:rPr lang="zh-TW" altLang="en-US"/>
               <a:t>第四層</a:t>
             </a:r>
           </a:p>
           <a:p>
             <a:pPr lvl="4"/>
             <a:r>
-              <a:rPr lang="zh-TW" altLang="en-US" smtClean="0"/>
+              <a:rPr lang="zh-TW" altLang="en-US"/>
               <a:t>第五層</a:t>
             </a:r>
-            <a:endParaRPr lang="zh-TW" altLang="en-US"/>
           </a:p>
         </p:txBody>
       </p:sp>
@@ -1646,7 +1632,7 @@
           <a:p>
             <a:pPr lvl="0"/>
             <a:r>
-              <a:rPr lang="zh-TW" altLang="en-US" smtClean="0"/>
+              <a:rPr lang="zh-TW" altLang="en-US"/>
               <a:t>按一下以編輯母片文字樣式</a:t>
             </a:r>
           </a:p>
@@ -1702,38 +1688,37 @@
           <a:p>
             <a:pPr lvl="0"/>
             <a:r>
-              <a:rPr lang="zh-TW" altLang="en-US" smtClean="0"/>
+              <a:rPr lang="zh-TW" altLang="en-US"/>
               <a:t>按一下以編輯母片文字樣式</a:t>
             </a:r>
           </a:p>
           <a:p>
             <a:pPr lvl="1"/>
             <a:r>
-              <a:rPr lang="zh-TW" altLang="en-US" smtClean="0"/>
+              <a:rPr lang="zh-TW" altLang="en-US"/>
               <a:t>第二層</a:t>
             </a:r>
           </a:p>
           <a:p>
             <a:pPr lvl="2"/>
             <a:r>
-              <a:rPr lang="zh-TW" altLang="en-US" smtClean="0"/>
+              <a:rPr lang="zh-TW" altLang="en-US"/>
               <a:t>第三層</a:t>
             </a:r>
           </a:p>
           <a:p>
             <a:pPr lvl="3"/>
             <a:r>
-              <a:rPr lang="zh-TW" altLang="en-US" smtClean="0"/>
+              <a:rPr lang="zh-TW" altLang="en-US"/>
               <a:t>第四層</a:t>
             </a:r>
           </a:p>
           <a:p>
             <a:pPr lvl="4"/>
             <a:r>
-              <a:rPr lang="zh-TW" altLang="en-US" smtClean="0"/>
+              <a:rPr lang="zh-TW" altLang="en-US"/>
               <a:t>第五層</a:t>
             </a:r>
-            <a:endParaRPr lang="zh-TW" altLang="en-US"/>
           </a:p>
         </p:txBody>
       </p:sp>
@@ -1754,7 +1739,7 @@
           <a:p>
             <a:fld id="{B4A29A6A-427F-4B19-8281-5DE5E0B60C4E}" type="datetimeFigureOut">
               <a:rPr lang="zh-TW" altLang="en-US" smtClean="0"/>
-              <a:t>2023/8/12</a:t>
+              <a:t>2024/6/22</a:t>
             </a:fld>
             <a:endParaRPr lang="zh-TW" altLang="en-US"/>
           </a:p>
@@ -1843,10 +1828,9 @@
           <a:lstStyle/>
           <a:p>
             <a:r>
-              <a:rPr lang="zh-TW" altLang="en-US" smtClean="0"/>
+              <a:rPr lang="zh-TW" altLang="en-US"/>
               <a:t>按一下以編輯母片標題樣式</a:t>
             </a:r>
-            <a:endParaRPr lang="zh-TW" altLang="en-US"/>
           </a:p>
         </p:txBody>
       </p:sp>
@@ -1867,7 +1851,7 @@
           <a:p>
             <a:fld id="{B4A29A6A-427F-4B19-8281-5DE5E0B60C4E}" type="datetimeFigureOut">
               <a:rPr lang="zh-TW" altLang="en-US" smtClean="0"/>
-              <a:t>2023/8/12</a:t>
+              <a:t>2024/6/22</a:t>
             </a:fld>
             <a:endParaRPr lang="zh-TW" altLang="en-US"/>
           </a:p>
@@ -1957,7 +1941,7 @@
           <a:p>
             <a:fld id="{B4A29A6A-427F-4B19-8281-5DE5E0B60C4E}" type="datetimeFigureOut">
               <a:rPr lang="zh-TW" altLang="en-US" smtClean="0"/>
-              <a:t>2023/8/12</a:t>
+              <a:t>2024/6/22</a:t>
             </a:fld>
             <a:endParaRPr lang="zh-TW" altLang="en-US"/>
           </a:p>
@@ -2055,10 +2039,9 @@
           </a:lstStyle>
           <a:p>
             <a:r>
-              <a:rPr lang="zh-TW" altLang="en-US" smtClean="0"/>
+              <a:rPr lang="zh-TW" altLang="en-US"/>
               <a:t>按一下以編輯母片標題樣式</a:t>
             </a:r>
-            <a:endParaRPr lang="zh-TW" altLang="en-US"/>
           </a:p>
         </p:txBody>
       </p:sp>
@@ -2112,38 +2095,37 @@
           <a:p>
             <a:pPr lvl="0"/>
             <a:r>
-              <a:rPr lang="zh-TW" altLang="en-US" smtClean="0"/>
+              <a:rPr lang="zh-TW" altLang="en-US"/>
               <a:t>按一下以編輯母片文字樣式</a:t>
             </a:r>
           </a:p>
           <a:p>
             <a:pPr lvl="1"/>
             <a:r>
-              <a:rPr lang="zh-TW" altLang="en-US" smtClean="0"/>
+              <a:rPr lang="zh-TW" altLang="en-US"/>
               <a:t>第二層</a:t>
             </a:r>
           </a:p>
           <a:p>
             <a:pPr lvl="2"/>
             <a:r>
-              <a:rPr lang="zh-TW" altLang="en-US" smtClean="0"/>
+              <a:rPr lang="zh-TW" altLang="en-US"/>
               <a:t>第三層</a:t>
             </a:r>
           </a:p>
           <a:p>
             <a:pPr lvl="3"/>
             <a:r>
-              <a:rPr lang="zh-TW" altLang="en-US" smtClean="0"/>
+              <a:rPr lang="zh-TW" altLang="en-US"/>
               <a:t>第四層</a:t>
             </a:r>
           </a:p>
           <a:p>
             <a:pPr lvl="4"/>
             <a:r>
-              <a:rPr lang="zh-TW" altLang="en-US" smtClean="0"/>
+              <a:rPr lang="zh-TW" altLang="en-US"/>
               <a:t>第五層</a:t>
             </a:r>
-            <a:endParaRPr lang="zh-TW" altLang="en-US"/>
           </a:p>
         </p:txBody>
       </p:sp>
@@ -2206,7 +2188,7 @@
           <a:p>
             <a:pPr lvl="0"/>
             <a:r>
-              <a:rPr lang="zh-TW" altLang="en-US" smtClean="0"/>
+              <a:rPr lang="zh-TW" altLang="en-US"/>
               <a:t>按一下以編輯母片文字樣式</a:t>
             </a:r>
           </a:p>
@@ -2229,7 +2211,7 @@
           <a:p>
             <a:fld id="{B4A29A6A-427F-4B19-8281-5DE5E0B60C4E}" type="datetimeFigureOut">
               <a:rPr lang="zh-TW" altLang="en-US" smtClean="0"/>
-              <a:t>2023/8/12</a:t>
+              <a:t>2024/6/22</a:t>
             </a:fld>
             <a:endParaRPr lang="zh-TW" altLang="en-US"/>
           </a:p>
@@ -2327,10 +2309,9 @@
           </a:lstStyle>
           <a:p>
             <a:r>
-              <a:rPr lang="zh-TW" altLang="en-US" smtClean="0"/>
+              <a:rPr lang="zh-TW" altLang="en-US"/>
               <a:t>按一下以編輯母片標題樣式</a:t>
             </a:r>
-            <a:endParaRPr lang="zh-TW" altLang="en-US"/>
           </a:p>
         </p:txBody>
       </p:sp>
@@ -2392,10 +2373,9 @@
           </a:lstStyle>
           <a:p>
             <a:r>
-              <a:rPr lang="zh-TW" altLang="en-US" smtClean="0"/>
+              <a:rPr lang="zh-TW" altLang="en-US"/>
               <a:t>按一下圖示以新增圖片</a:t>
             </a:r>
-            <a:endParaRPr lang="zh-TW" altLang="en-US"/>
           </a:p>
         </p:txBody>
       </p:sp>
@@ -2458,7 +2438,7 @@
           <a:p>
             <a:pPr lvl="0"/>
             <a:r>
-              <a:rPr lang="zh-TW" altLang="en-US" smtClean="0"/>
+              <a:rPr lang="zh-TW" altLang="en-US"/>
               <a:t>按一下以編輯母片文字樣式</a:t>
             </a:r>
           </a:p>
@@ -2481,7 +2461,7 @@
           <a:p>
             <a:fld id="{B4A29A6A-427F-4B19-8281-5DE5E0B60C4E}" type="datetimeFigureOut">
               <a:rPr lang="zh-TW" altLang="en-US" smtClean="0"/>
-              <a:t>2023/8/12</a:t>
+              <a:t>2024/6/22</a:t>
             </a:fld>
             <a:endParaRPr lang="zh-TW" altLang="en-US"/>
           </a:p>
@@ -2590,10 +2570,9 @@
           <a:lstStyle/>
           <a:p>
             <a:r>
-              <a:rPr lang="zh-TW" altLang="en-US" smtClean="0"/>
+              <a:rPr lang="zh-TW" altLang="en-US"/>
               <a:t>按一下以編輯母片標題樣式</a:t>
             </a:r>
-            <a:endParaRPr lang="zh-TW" altLang="en-US"/>
           </a:p>
         </p:txBody>
       </p:sp>
@@ -2624,38 +2603,37 @@
           <a:p>
             <a:pPr lvl="0"/>
             <a:r>
-              <a:rPr lang="zh-TW" altLang="en-US" smtClean="0"/>
+              <a:rPr lang="zh-TW" altLang="en-US"/>
               <a:t>按一下以編輯母片文字樣式</a:t>
             </a:r>
           </a:p>
           <a:p>
             <a:pPr lvl="1"/>
             <a:r>
-              <a:rPr lang="zh-TW" altLang="en-US" smtClean="0"/>
+              <a:rPr lang="zh-TW" altLang="en-US"/>
               <a:t>第二層</a:t>
             </a:r>
           </a:p>
           <a:p>
             <a:pPr lvl="2"/>
             <a:r>
-              <a:rPr lang="zh-TW" altLang="en-US" smtClean="0"/>
+              <a:rPr lang="zh-TW" altLang="en-US"/>
               <a:t>第三層</a:t>
             </a:r>
           </a:p>
           <a:p>
             <a:pPr lvl="3"/>
             <a:r>
-              <a:rPr lang="zh-TW" altLang="en-US" smtClean="0"/>
+              <a:rPr lang="zh-TW" altLang="en-US"/>
               <a:t>第四層</a:t>
             </a:r>
           </a:p>
           <a:p>
             <a:pPr lvl="4"/>
             <a:r>
-              <a:rPr lang="zh-TW" altLang="en-US" smtClean="0"/>
+              <a:rPr lang="zh-TW" altLang="en-US"/>
               <a:t>第五層</a:t>
             </a:r>
-            <a:endParaRPr lang="zh-TW" altLang="en-US"/>
           </a:p>
         </p:txBody>
       </p:sp>
@@ -2694,7 +2672,7 @@
           <a:p>
             <a:fld id="{B4A29A6A-427F-4B19-8281-5DE5E0B60C4E}" type="datetimeFigureOut">
               <a:rPr lang="zh-TW" altLang="en-US" smtClean="0"/>
-              <a:t>2023/8/12</a:t>
+              <a:t>2024/6/22</a:t>
             </a:fld>
             <a:endParaRPr lang="zh-TW" altLang="en-US"/>
           </a:p>
@@ -3130,13 +3108,6 @@
   <p:clrMapOvr>
     <a:masterClrMapping/>
   </p:clrMapOvr>
-  <p:timing>
-    <p:tnLst>
-      <p:par>
-        <p:cTn id="1" dur="indefinite" restart="never" nodeType="tmRoot"/>
-      </p:par>
-    </p:tnLst>
-  </p:timing>
 </p:sld>
 </file>
 
@@ -3212,20 +3183,10 @@
                 <a:latin typeface="微軟正黑體" pitchFamily="34" charset="-120"/>
                 <a:ea typeface="微軟正黑體" pitchFamily="34" charset="-120"/>
               </a:rPr>
-              <a:t>深深知</a:t>
-            </a:r>
-            <a:r>
-              <a:rPr lang="zh-TW" altLang="en-US" sz="6400" b="1" dirty="0" smtClean="0">
-                <a:solidFill>
-                  <a:srgbClr val="000066"/>
-                </a:solidFill>
-                <a:latin typeface="微軟正黑體" pitchFamily="34" charset="-120"/>
-                <a:ea typeface="微軟正黑體" pitchFamily="34" charset="-120"/>
-              </a:rPr>
-              <a:t>道</a:t>
-            </a:r>
-            <a:r>
-              <a:rPr lang="zh-CN" altLang="en-US" sz="6400" b="1" dirty="0" smtClean="0">
+              <a:t>深深知道</a:t>
+            </a:r>
+            <a:r>
+              <a:rPr lang="zh-CN" altLang="en-US" sz="6400" b="1" dirty="0">
                 <a:solidFill>
                   <a:srgbClr val="000066"/>
                 </a:solidFill>
@@ -3235,24 +3196,14 @@
               <a:t>祢</a:t>
             </a:r>
             <a:r>
-              <a:rPr lang="zh-TW" altLang="en-US" sz="6400" b="1" dirty="0" smtClean="0">
+              <a:rPr lang="zh-TW" altLang="en-US" sz="6400" b="1" dirty="0">
                 <a:solidFill>
                   <a:srgbClr val="000066"/>
                 </a:solidFill>
                 <a:latin typeface="微軟正黑體" pitchFamily="34" charset="-120"/>
                 <a:ea typeface="微軟正黑體" pitchFamily="34" charset="-120"/>
               </a:rPr>
-              <a:t>是</a:t>
-            </a:r>
-            <a:r>
-              <a:rPr lang="zh-TW" altLang="en-US" sz="6400" b="1" dirty="0">
-                <a:solidFill>
-                  <a:srgbClr val="000066"/>
-                </a:solidFill>
-                <a:latin typeface="微軟正黑體" pitchFamily="34" charset="-120"/>
-                <a:ea typeface="微軟正黑體" pitchFamily="34" charset="-120"/>
-              </a:rPr>
-              <a:t>我的神</a:t>
+              <a:t>是我的神</a:t>
             </a:r>
             <a:endParaRPr lang="en-US" altLang="zh-TW" sz="6400" b="1" dirty="0">
               <a:solidFill>
@@ -3273,7 +3224,7 @@
         <p:spPr>
           <a:xfrm>
             <a:off x="0" y="5085184"/>
-            <a:ext cx="12192000" cy="769441"/>
+            <a:ext cx="12192000" cy="584775"/>
           </a:xfrm>
           <a:prstGeom prst="rect">
             <a:avLst/>
@@ -3288,7 +3239,7 @@
           <a:p>
             <a:pPr algn="ctr"/>
             <a:r>
-              <a:rPr lang="en-US" sz="4400" b="1" dirty="0">
+              <a:rPr lang="en-US" sz="3200" b="1" dirty="0">
                 <a:solidFill>
                   <a:srgbClr val="000066"/>
                 </a:solidFill>
@@ -3299,7 +3250,7 @@
               <a:t>( </a:t>
             </a:r>
             <a:r>
-              <a:rPr lang="zh-CN" altLang="en-US" sz="4400" b="1" dirty="0" smtClean="0">
+              <a:rPr lang="zh-CN" altLang="en-US" sz="3200" b="1" dirty="0">
                 <a:solidFill>
                   <a:srgbClr val="000066"/>
                 </a:solidFill>
@@ -3307,10 +3258,10 @@
                 <a:latin typeface="Microsoft JhengHei" panose="020B0604030504040204" pitchFamily="34" charset="-120"/>
                 <a:ea typeface="Microsoft JhengHei" panose="020B0604030504040204" pitchFamily="34" charset="-120"/>
               </a:rPr>
-              <a:t>正</a:t>
-            </a:r>
-            <a:r>
-              <a:rPr lang="en-US" sz="4400" b="1" dirty="0" smtClean="0">
+              <a:t>正歌</a:t>
+            </a:r>
+            <a:r>
+              <a:rPr lang="en-US" sz="3200" b="1" dirty="0">
                 <a:solidFill>
                   <a:srgbClr val="000066"/>
                 </a:solidFill>
@@ -3318,20 +3269,9 @@
                 <a:latin typeface="Microsoft JhengHei" panose="020B0604030504040204" pitchFamily="34" charset="-120"/>
                 <a:ea typeface="Microsoft JhengHei" panose="020B0604030504040204" pitchFamily="34" charset="-120"/>
               </a:rPr>
-              <a:t> </a:t>
-            </a:r>
-            <a:r>
-              <a:rPr lang="en-US" sz="4400" b="1" dirty="0">
-                <a:solidFill>
-                  <a:srgbClr val="000066"/>
-                </a:solidFill>
-                <a:effectLst/>
-                <a:latin typeface="Microsoft JhengHei" panose="020B0604030504040204" pitchFamily="34" charset="-120"/>
-                <a:ea typeface="Microsoft JhengHei" panose="020B0604030504040204" pitchFamily="34" charset="-120"/>
-              </a:rPr>
-              <a:t>)</a:t>
-            </a:r>
-            <a:endParaRPr lang="vi-VN" sz="4400" b="1" dirty="0">
+              <a:t> )</a:t>
+            </a:r>
+            <a:endParaRPr lang="vi-VN" sz="3200" b="1" dirty="0">
               <a:solidFill>
                 <a:srgbClr val="000066"/>
               </a:solidFill>
@@ -3352,13 +3292,6 @@
   <p:clrMapOvr>
     <a:masterClrMapping/>
   </p:clrMapOvr>
-  <p:timing>
-    <p:tnLst>
-      <p:par>
-        <p:cTn id="1" dur="indefinite" restart="never" nodeType="tmRoot"/>
-      </p:par>
-    </p:tnLst>
-  </p:timing>
 </p:sld>
 </file>
 
@@ -3434,20 +3367,10 @@
                 <a:latin typeface="微軟正黑體" pitchFamily="34" charset="-120"/>
                 <a:ea typeface="微軟正黑體" pitchFamily="34" charset="-120"/>
               </a:rPr>
-              <a:t>在我身</a:t>
-            </a:r>
-            <a:r>
-              <a:rPr lang="zh-TW" altLang="en-US" sz="6400" b="1" dirty="0" smtClean="0">
-                <a:solidFill>
-                  <a:srgbClr val="000066"/>
-                </a:solidFill>
-                <a:latin typeface="微軟正黑體" pitchFamily="34" charset="-120"/>
-                <a:ea typeface="微軟正黑體" pitchFamily="34" charset="-120"/>
-              </a:rPr>
-              <a:t>旁</a:t>
-            </a:r>
-            <a:r>
-              <a:rPr lang="zh-CN" altLang="en-US" sz="6400" b="1" dirty="0" smtClean="0">
+              <a:t>在我身旁</a:t>
+            </a:r>
+            <a:r>
+              <a:rPr lang="zh-CN" altLang="en-US" sz="6400" b="1" dirty="0">
                 <a:solidFill>
                   <a:srgbClr val="000066"/>
                 </a:solidFill>
@@ -3457,24 +3380,14 @@
               <a:t>祢</a:t>
             </a:r>
             <a:r>
-              <a:rPr lang="zh-TW" altLang="en-US" sz="6400" b="1" dirty="0" smtClean="0">
+              <a:rPr lang="zh-TW" altLang="en-US" sz="6400" b="1" dirty="0">
                 <a:solidFill>
                   <a:srgbClr val="000066"/>
                 </a:solidFill>
                 <a:latin typeface="微軟正黑體" pitchFamily="34" charset="-120"/>
                 <a:ea typeface="微軟正黑體" pitchFamily="34" charset="-120"/>
               </a:rPr>
-              <a:t>使</a:t>
-            </a:r>
-            <a:r>
-              <a:rPr lang="zh-TW" altLang="en-US" sz="6400" b="1" dirty="0">
-                <a:solidFill>
-                  <a:srgbClr val="000066"/>
-                </a:solidFill>
-                <a:latin typeface="微軟正黑體" pitchFamily="34" charset="-120"/>
-                <a:ea typeface="微軟正黑體" pitchFamily="34" charset="-120"/>
-              </a:rPr>
-              <a:t>風浪平息</a:t>
+              <a:t>使風浪平息</a:t>
             </a:r>
           </a:p>
         </p:txBody>
@@ -3488,7 +3401,7 @@
         <p:spPr>
           <a:xfrm>
             <a:off x="0" y="5085184"/>
-            <a:ext cx="12192000" cy="769441"/>
+            <a:ext cx="12192000" cy="584775"/>
           </a:xfrm>
           <a:prstGeom prst="rect">
             <a:avLst/>
@@ -3503,55 +3416,39 @@
           <a:p>
             <a:pPr algn="ctr"/>
             <a:r>
-              <a:rPr lang="en-US" sz="4400" b="1" dirty="0">
+              <a:rPr lang="en-US" sz="3200" b="1" dirty="0">
                 <a:solidFill>
                   <a:srgbClr val="000066"/>
                 </a:solidFill>
-                <a:effectLst/>
                 <a:latin typeface="Microsoft JhengHei" panose="020B0604030504040204" pitchFamily="34" charset="-120"/>
                 <a:ea typeface="Microsoft JhengHei" panose="020B0604030504040204" pitchFamily="34" charset="-120"/>
               </a:rPr>
               <a:t>( </a:t>
             </a:r>
             <a:r>
-              <a:rPr lang="zh-CN" altLang="en-US" sz="4400" b="1" dirty="0" smtClean="0">
+              <a:rPr lang="zh-CN" altLang="en-US" sz="3200" b="1" dirty="0">
                 <a:solidFill>
                   <a:srgbClr val="000066"/>
                 </a:solidFill>
-                <a:effectLst/>
                 <a:latin typeface="Microsoft JhengHei" panose="020B0604030504040204" pitchFamily="34" charset="-120"/>
                 <a:ea typeface="Microsoft JhengHei" panose="020B0604030504040204" pitchFamily="34" charset="-120"/>
               </a:rPr>
-              <a:t>正</a:t>
-            </a:r>
-            <a:r>
-              <a:rPr lang="en-US" sz="4400" b="1" dirty="0" smtClean="0">
+              <a:t>正歌</a:t>
+            </a:r>
+            <a:r>
+              <a:rPr lang="en-US" sz="3200" b="1" dirty="0">
                 <a:solidFill>
                   <a:srgbClr val="000066"/>
                 </a:solidFill>
-                <a:effectLst/>
                 <a:latin typeface="Microsoft JhengHei" panose="020B0604030504040204" pitchFamily="34" charset="-120"/>
                 <a:ea typeface="Microsoft JhengHei" panose="020B0604030504040204" pitchFamily="34" charset="-120"/>
               </a:rPr>
-              <a:t> </a:t>
-            </a:r>
-            <a:r>
-              <a:rPr lang="en-US" sz="4400" b="1" dirty="0">
-                <a:solidFill>
-                  <a:srgbClr val="000066"/>
-                </a:solidFill>
-                <a:effectLst/>
-                <a:latin typeface="Microsoft JhengHei" panose="020B0604030504040204" pitchFamily="34" charset="-120"/>
-                <a:ea typeface="Microsoft JhengHei" panose="020B0604030504040204" pitchFamily="34" charset="-120"/>
-              </a:rPr>
-              <a:t>)</a:t>
-            </a:r>
-            <a:endParaRPr lang="vi-VN" sz="4400" b="1" dirty="0">
+              <a:t> )</a:t>
+            </a:r>
+            <a:endParaRPr lang="vi-VN" sz="3200" b="1" dirty="0">
               <a:solidFill>
                 <a:srgbClr val="000066"/>
               </a:solidFill>
-              <a:effectLst/>
-              <a:latin typeface="Microsoft JhengHei" panose="020B0604030504040204" pitchFamily="34" charset="-120"/>
               <a:ea typeface="Microsoft JhengHei" panose="020B0604030504040204" pitchFamily="34" charset="-120"/>
             </a:endParaRPr>
           </a:p>
@@ -3567,13 +3464,6 @@
   <p:clrMapOvr>
     <a:masterClrMapping/>
   </p:clrMapOvr>
-  <p:timing>
-    <p:tnLst>
-      <p:par>
-        <p:cTn id="1" dur="indefinite" restart="never" nodeType="tmRoot"/>
-      </p:par>
-    </p:tnLst>
-  </p:timing>
 </p:sld>
 </file>
 
@@ -3642,7 +3532,7 @@
               <a:buNone/>
             </a:pPr>
             <a:r>
-              <a:rPr lang="zh-CN" altLang="en-US" sz="6400" b="1" dirty="0" smtClean="0">
+              <a:rPr lang="zh-CN" altLang="en-US" sz="6400" b="1" dirty="0">
                 <a:solidFill>
                   <a:srgbClr val="000066"/>
                 </a:solidFill>
@@ -3652,24 +3542,14 @@
               <a:t>祢</a:t>
             </a:r>
             <a:r>
-              <a:rPr lang="zh-TW" altLang="en-US" sz="6400" b="1" dirty="0" smtClean="0">
+              <a:rPr lang="zh-TW" altLang="en-US" sz="6400" b="1" dirty="0">
                 <a:solidFill>
                   <a:srgbClr val="000066"/>
                 </a:solidFill>
                 <a:latin typeface="微軟正黑體" pitchFamily="34" charset="-120"/>
                 <a:ea typeface="微軟正黑體" pitchFamily="34" charset="-120"/>
               </a:rPr>
-              <a:t>陪</a:t>
-            </a:r>
-            <a:r>
-              <a:rPr lang="zh-TW" altLang="en-US" sz="6400" b="1" dirty="0">
-                <a:solidFill>
-                  <a:srgbClr val="000066"/>
-                </a:solidFill>
-                <a:latin typeface="微軟正黑體" pitchFamily="34" charset="-120"/>
-                <a:ea typeface="微軟正黑體" pitchFamily="34" charset="-120"/>
-              </a:rPr>
-              <a:t>我走向應許之處</a:t>
+              <a:t>陪我走向應許之處</a:t>
             </a:r>
             <a:endParaRPr lang="en-US" altLang="zh-TW" sz="6400" b="1" dirty="0">
               <a:solidFill>
@@ -3690,7 +3570,7 @@
         <p:spPr>
           <a:xfrm>
             <a:off x="0" y="5085184"/>
-            <a:ext cx="12192000" cy="769441"/>
+            <a:ext cx="12192000" cy="584775"/>
           </a:xfrm>
           <a:prstGeom prst="rect">
             <a:avLst/>
@@ -3705,55 +3585,39 @@
           <a:p>
             <a:pPr algn="ctr"/>
             <a:r>
-              <a:rPr lang="en-US" sz="4400" b="1" dirty="0">
+              <a:rPr lang="en-US" sz="3200" b="1" dirty="0">
                 <a:solidFill>
                   <a:srgbClr val="000066"/>
                 </a:solidFill>
-                <a:effectLst/>
                 <a:latin typeface="Microsoft JhengHei" panose="020B0604030504040204" pitchFamily="34" charset="-120"/>
                 <a:ea typeface="Microsoft JhengHei" panose="020B0604030504040204" pitchFamily="34" charset="-120"/>
               </a:rPr>
               <a:t>( </a:t>
             </a:r>
             <a:r>
-              <a:rPr lang="zh-CN" altLang="en-US" sz="4400" b="1" dirty="0" smtClean="0">
+              <a:rPr lang="zh-CN" altLang="en-US" sz="3200" b="1" dirty="0">
                 <a:solidFill>
                   <a:srgbClr val="000066"/>
                 </a:solidFill>
-                <a:effectLst/>
                 <a:latin typeface="Microsoft JhengHei" panose="020B0604030504040204" pitchFamily="34" charset="-120"/>
                 <a:ea typeface="Microsoft JhengHei" panose="020B0604030504040204" pitchFamily="34" charset="-120"/>
               </a:rPr>
-              <a:t>副</a:t>
-            </a:r>
-            <a:r>
-              <a:rPr lang="en-US" sz="4400" b="1" dirty="0" smtClean="0">
+              <a:t>副歌</a:t>
+            </a:r>
+            <a:r>
+              <a:rPr lang="en-US" sz="3200" b="1" dirty="0">
                 <a:solidFill>
                   <a:srgbClr val="000066"/>
                 </a:solidFill>
-                <a:effectLst/>
                 <a:latin typeface="Microsoft JhengHei" panose="020B0604030504040204" pitchFamily="34" charset="-120"/>
                 <a:ea typeface="Microsoft JhengHei" panose="020B0604030504040204" pitchFamily="34" charset="-120"/>
               </a:rPr>
-              <a:t> </a:t>
-            </a:r>
-            <a:r>
-              <a:rPr lang="en-US" sz="4400" b="1" dirty="0">
-                <a:solidFill>
-                  <a:srgbClr val="000066"/>
-                </a:solidFill>
-                <a:effectLst/>
-                <a:latin typeface="Microsoft JhengHei" panose="020B0604030504040204" pitchFamily="34" charset="-120"/>
-                <a:ea typeface="Microsoft JhengHei" panose="020B0604030504040204" pitchFamily="34" charset="-120"/>
-              </a:rPr>
-              <a:t>)</a:t>
-            </a:r>
-            <a:endParaRPr lang="vi-VN" sz="4400" b="1" dirty="0">
+              <a:t> )</a:t>
+            </a:r>
+            <a:endParaRPr lang="vi-VN" sz="3200" b="1" dirty="0">
               <a:solidFill>
                 <a:srgbClr val="000066"/>
               </a:solidFill>
-              <a:effectLst/>
-              <a:latin typeface="Microsoft JhengHei" panose="020B0604030504040204" pitchFamily="34" charset="-120"/>
               <a:ea typeface="Microsoft JhengHei" panose="020B0604030504040204" pitchFamily="34" charset="-120"/>
             </a:endParaRPr>
           </a:p>
@@ -3769,13 +3633,6 @@
   <p:clrMapOvr>
     <a:masterClrMapping/>
   </p:clrMapOvr>
-  <p:timing>
-    <p:tnLst>
-      <p:par>
-        <p:cTn id="1" dur="indefinite" restart="never" nodeType="tmRoot"/>
-      </p:par>
-    </p:tnLst>
-  </p:timing>
 </p:sld>
 </file>
 
@@ -3851,20 +3708,10 @@
                 <a:latin typeface="微軟正黑體" pitchFamily="34" charset="-120"/>
                 <a:ea typeface="微軟正黑體" pitchFamily="34" charset="-120"/>
               </a:rPr>
-              <a:t>生命滿</a:t>
-            </a:r>
-            <a:r>
-              <a:rPr lang="zh-TW" altLang="en-US" sz="6400" b="1" dirty="0" smtClean="0">
-                <a:solidFill>
-                  <a:srgbClr val="000066"/>
-                </a:solidFill>
-                <a:latin typeface="微軟正黑體" pitchFamily="34" charset="-120"/>
-                <a:ea typeface="微軟正黑體" pitchFamily="34" charset="-120"/>
-              </a:rPr>
-              <a:t>有</a:t>
-            </a:r>
-            <a:r>
-              <a:rPr lang="zh-CN" altLang="en-US" sz="6400" b="1" dirty="0" smtClean="0">
+              <a:t>生命滿有</a:t>
+            </a:r>
+            <a:r>
+              <a:rPr lang="zh-CN" altLang="en-US" sz="6400" b="1" dirty="0">
                 <a:solidFill>
                   <a:srgbClr val="000066"/>
                 </a:solidFill>
@@ -3874,24 +3721,14 @@
               <a:t>祢</a:t>
             </a:r>
             <a:r>
-              <a:rPr lang="zh-TW" altLang="en-US" sz="6400" b="1" dirty="0" smtClean="0">
+              <a:rPr lang="zh-TW" altLang="en-US" sz="6400" b="1" dirty="0">
                 <a:solidFill>
                   <a:srgbClr val="000066"/>
                 </a:solidFill>
                 <a:latin typeface="微軟正黑體" pitchFamily="34" charset="-120"/>
                 <a:ea typeface="微軟正黑體" pitchFamily="34" charset="-120"/>
               </a:rPr>
-              <a:t>的</a:t>
-            </a:r>
-            <a:r>
-              <a:rPr lang="zh-TW" altLang="en-US" sz="6400" b="1" dirty="0">
-                <a:solidFill>
-                  <a:srgbClr val="000066"/>
-                </a:solidFill>
-                <a:latin typeface="微軟正黑體" pitchFamily="34" charset="-120"/>
-                <a:ea typeface="微軟正黑體" pitchFamily="34" charset="-120"/>
-              </a:rPr>
-              <a:t>印記</a:t>
+              <a:t>的印記</a:t>
             </a:r>
           </a:p>
         </p:txBody>
@@ -3905,7 +3742,7 @@
         <p:spPr>
           <a:xfrm>
             <a:off x="0" y="5085184"/>
-            <a:ext cx="12192000" cy="769441"/>
+            <a:ext cx="12192000" cy="584775"/>
           </a:xfrm>
           <a:prstGeom prst="rect">
             <a:avLst/>
@@ -3920,55 +3757,39 @@
           <a:p>
             <a:pPr algn="ctr"/>
             <a:r>
-              <a:rPr lang="en-US" sz="4400" b="1" dirty="0">
+              <a:rPr lang="en-US" sz="3200" b="1" dirty="0">
                 <a:solidFill>
                   <a:srgbClr val="000066"/>
                 </a:solidFill>
-                <a:effectLst/>
                 <a:latin typeface="Microsoft JhengHei" panose="020B0604030504040204" pitchFamily="34" charset="-120"/>
                 <a:ea typeface="Microsoft JhengHei" panose="020B0604030504040204" pitchFamily="34" charset="-120"/>
               </a:rPr>
               <a:t>( </a:t>
             </a:r>
             <a:r>
-              <a:rPr lang="zh-CN" altLang="en-US" sz="4400" b="1" dirty="0" smtClean="0">
+              <a:rPr lang="zh-CN" altLang="en-US" sz="3200" b="1" dirty="0">
                 <a:solidFill>
                   <a:srgbClr val="000066"/>
                 </a:solidFill>
-                <a:effectLst/>
                 <a:latin typeface="Microsoft JhengHei" panose="020B0604030504040204" pitchFamily="34" charset="-120"/>
                 <a:ea typeface="Microsoft JhengHei" panose="020B0604030504040204" pitchFamily="34" charset="-120"/>
               </a:rPr>
-              <a:t>副</a:t>
-            </a:r>
-            <a:r>
-              <a:rPr lang="en-US" sz="4400" b="1" dirty="0" smtClean="0">
+              <a:t>副歌</a:t>
+            </a:r>
+            <a:r>
+              <a:rPr lang="en-US" sz="3200" b="1" dirty="0">
                 <a:solidFill>
                   <a:srgbClr val="000066"/>
                 </a:solidFill>
-                <a:effectLst/>
                 <a:latin typeface="Microsoft JhengHei" panose="020B0604030504040204" pitchFamily="34" charset="-120"/>
                 <a:ea typeface="Microsoft JhengHei" panose="020B0604030504040204" pitchFamily="34" charset="-120"/>
               </a:rPr>
-              <a:t> </a:t>
-            </a:r>
-            <a:r>
-              <a:rPr lang="en-US" sz="4400" b="1" dirty="0">
-                <a:solidFill>
-                  <a:srgbClr val="000066"/>
-                </a:solidFill>
-                <a:effectLst/>
-                <a:latin typeface="Microsoft JhengHei" panose="020B0604030504040204" pitchFamily="34" charset="-120"/>
-                <a:ea typeface="Microsoft JhengHei" panose="020B0604030504040204" pitchFamily="34" charset="-120"/>
-              </a:rPr>
-              <a:t>)</a:t>
-            </a:r>
-            <a:endParaRPr lang="vi-VN" sz="4400" b="1" dirty="0">
+              <a:t> )</a:t>
+            </a:r>
+            <a:endParaRPr lang="vi-VN" sz="3200" b="1" dirty="0">
               <a:solidFill>
                 <a:srgbClr val="000066"/>
               </a:solidFill>
-              <a:effectLst/>
-              <a:latin typeface="Microsoft JhengHei" panose="020B0604030504040204" pitchFamily="34" charset="-120"/>
               <a:ea typeface="Microsoft JhengHei" panose="020B0604030504040204" pitchFamily="34" charset="-120"/>
             </a:endParaRPr>
           </a:p>
@@ -3984,13 +3805,6 @@
   <p:clrMapOvr>
     <a:masterClrMapping/>
   </p:clrMapOvr>
-  <p:timing>
-    <p:tnLst>
-      <p:par>
-        <p:cTn id="1" dur="indefinite" restart="never" nodeType="tmRoot"/>
-      </p:par>
-    </p:tnLst>
-  </p:timing>
 </p:sld>
 </file>
 
